--- a/reports/Mark_Villola_Business_Presentation_withSpeakerNotes.pptx
+++ b/reports/Mark_Villola_Business_Presentation_withSpeakerNotes.pptx
@@ -2129,7 +2129,7 @@
                   <a:srgbClr val="BFDBFE"/>
                 </a:solidFill>
               </a:rPr>
-              <a:t>AIM AI &amp; ML Postgraduate Diploma  |  Capstone Project  |  March 2025</a:t>
+              <a:t>AIM AI &amp; ML Postgraduate Diploma  |  Capstone Project  |  March 2026</a:t>
             </a:r>
             <a:endParaRPr lang="en-US" sz="950" dirty="0"/>
           </a:p>
